--- a/ppt和作品简介/基于多Agent的汽车销售自主成交智能助手-初赛方案.pptx
+++ b/ppt和作品简介/基于多Agent的汽车销售自主成交智能助手-初赛方案.pptx
@@ -18,6 +18,7 @@
     <p:sldId id="266" r:id="rId18"/>
     <p:sldId id="267" r:id="rId19"/>
     <p:sldId id="268" r:id="rId20"/>
+    <p:sldId id="269" r:id="rId21"/>
   </p:sldIdLst>
   <p:sldSz cx="12191695" cy="6858000" type="screen4x3"/>
   <p:notesSz cx="6858000" cy="9144000"/>
@@ -6579,7 +6580,8 @@
                 <a:latin typeface="Microsoft YaHei"/>
                 <a:ea typeface="Microsoft YaHei"/>
               </a:rPr>
-              <a:t>· Metrics：会话数 / 时延 / Token 消耗 / 工具成功率</a:t>
+              <a:t>· Metrics：会话数 / 时延 / Token 消耗 / 工具成功率
+· Audit：高风险动作结构化轨迹（append-only，TraceId 关联，可按 approval_id 筛选）</a:t>
             </a:r>
           </a:p>
         </p:txBody>
@@ -6982,7 +6984,7 @@
                 <a:latin typeface="Microsoft YaHei"/>
                 <a:ea typeface="Microsoft YaHei"/>
               </a:rPr>
-              <a:t>10 / 13</a:t>
+              <a:t>10 / 14</a:t>
             </a:r>
           </a:p>
         </p:txBody>
@@ -8601,7 +8603,7 @@
                 <a:latin typeface="Microsoft YaHei"/>
                 <a:ea typeface="Microsoft YaHei"/>
               </a:rPr>
-              <a:t>11 / 13</a:t>
+              <a:t>11 / 14</a:t>
             </a:r>
           </a:p>
         </p:txBody>
@@ -9930,7 +9932,7 @@
                 <a:latin typeface="Microsoft YaHei"/>
                 <a:ea typeface="Microsoft YaHei"/>
               </a:rPr>
-              <a:t>开源 Skill 清单、MCP 接口契约与示例场景，作为企业智能销售平台基础能力持续扩展。</a:t>
+              <a:t>开源 Skill 清单、MCP 接口契约与示例场景，作为企业智能销售平台基础能力持续扩展。三个 LLM 自主决策点（审批门禁 approve/reject/pending + 车型推荐匹配度评估 + 工具调用顺序自主规划），决策与执行分离 + append-only 审计是高风险销售场景的通用风控范式。</a:t>
             </a:r>
           </a:p>
         </p:txBody>
@@ -10066,7 +10068,7 @@
                 <a:latin typeface="Microsoft YaHei"/>
                 <a:ea typeface="Microsoft YaHei"/>
               </a:rPr>
-              <a:t>12 / 13</a:t>
+              <a:t>12 / 14</a:t>
             </a:r>
           </a:p>
         </p:txBody>
@@ -10584,7 +10586,7 @@
                 <a:latin typeface="Microsoft YaHei"/>
                 <a:ea typeface="Microsoft YaHei"/>
               </a:rPr>
-              <a:t>✓ 8 Agent（附录 A 8 字段）+ 11 Skill（附录 B 10 字段）+ AgentTeams 编排材料齐备</a:t>
+              <a:t>✓ 8 Agent（附录 A 8 字段）+ 11 Skill（附录 B 10 字段）+ AgentTeams 真框架 3 场景一天全闭环（11 容器 v1.1.2 · 8/16 单日）</a:t>
             </a:r>
           </a:p>
           <a:p>
@@ -10607,7 +10609,7 @@
                 <a:latin typeface="Microsoft YaHei"/>
                 <a:ea typeface="Microsoft YaHei"/>
               </a:rPr>
-              <a:t>✓ HTTP mock 工具网关：9 类工具 · 3 场景 · MCP 等价契约与迁移路径</a:t>
+              <a:t>✓ HTTP mock 工具网关：22 工具(9 类) · 3 场景 · MCP 等价契约 + 三个 LLM 决策点(审批门禁+车型推荐+工具调用顺序)</a:t>
             </a:r>
           </a:p>
           <a:p>
@@ -10653,7 +10655,7 @@
                 <a:latin typeface="Microsoft YaHei"/>
                 <a:ea typeface="Microsoft YaHei"/>
               </a:rPr>
-              <a:t>✓ 离线自检 36/36 断言通过，运行证据落盘（docs/EVIDENCE.md）</a:t>
+              <a:t>✓ 自检 56/56 + 编排 G1/G2/G3 + 三个 LLM 决策点(审批三安全分支+车型推荐+工具顺序) + OTel 运行时 39 span + 重放 95 span + OSS REST 签名验证 + RAG/记忆 + 评估 1.0</a:t>
             </a:r>
           </a:p>
           <a:p>
@@ -10676,7 +10678,7 @@
                 <a:latin typeface="Microsoft YaHei"/>
                 <a:ea typeface="Microsoft YaHei"/>
               </a:rPr>
-              <a:t>✓ AgentTeams 实际运行：3 场景 79 次工具调用（DEAL-2001:33 / DEAL-2002:24 / DEAL-2003:22）</a:t>
+              <a:t>✓ AgentTeams 真框架跑通：3 场景全闭环 · 24 DAG 节点全绿 · 116 次工具调用 100% 成功 · 4 类真实故障代码级自愈</a:t>
             </a:r>
           </a:p>
         </p:txBody>
@@ -10883,7 +10885,7 @@
                 <a:latin typeface="Microsoft YaHei"/>
                 <a:ea typeface="Microsoft YaHei"/>
               </a:rPr>
-              <a:t>→ AgentTeams 实际部署：Manager 创建 Team 现场跑通 3 场景</a:t>
+              <a:t>→ 多模型路由与调度策略优化 · Agent/Skill/LLM 层可观测 Span 补齐</a:t>
             </a:r>
           </a:p>
           <a:p>
@@ -11023,7 +11025,7 @@
                 <a:latin typeface="Microsoft YaHei"/>
                 <a:ea typeface="Microsoft YaHei"/>
               </a:rPr>
-              <a:t>证据索引（docs/EVIDENCE.md）：</a:t>
+              <a:t>证据索引（docs/EVIDENCE.md）：自检 56/56 断言 · AgentTeams 真框架 3 场景全闭环（116 次工具调用 100% 成功） · 每场景 Trace ≥10 条 · L2 审批 / 订单回滚 / 底线转人工用例各在环 · 3 场景期望信号表可逐项对照</a:t>
             </a:r>
             <a:r>
               <a:rPr sz="1050" b="0">
@@ -11033,7 +11035,7 @@
                 <a:latin typeface="Microsoft YaHei"/>
                 <a:ea typeface="Microsoft YaHei"/>
               </a:rPr>
-              <a:t>自检 36/36 断言 · AgentTeams 实际运行 3 场景 79 次工具调用 · 每场景 Trace ≥10 条 · L2 审批 / 订单回滚 / 底线转人工用例各在环 · 3 场景期望信号表可逐项对照</a:t>
+              <a:t/>
             </a:r>
           </a:p>
         </p:txBody>
@@ -11127,7 +11129,7 @@
                 <a:latin typeface="Microsoft YaHei"/>
                 <a:ea typeface="Microsoft YaHei"/>
               </a:rPr>
-              <a:t>边界声明：</a:t>
+              <a:t>边界声明：初赛聚焦 mock 环境任务级自主闭环（方案设计+可复现断言+三个 LLM 决策点已驱动+OTel 运行时插桩+OSS REST 签名验证+AgentTeams 真框架已跑）；会话级自由对话、真实系统接入、生产级风控在复赛推进。</a:t>
             </a:r>
             <a:r>
               <a:rPr sz="1100" b="0">
@@ -11137,7 +11139,7 @@
                 <a:latin typeface="Microsoft YaHei"/>
                 <a:ea typeface="Microsoft YaHei"/>
               </a:rPr>
-              <a:t>初赛聚焦 mock 环境的任务级自主闭环（方案设计 + 可复现断言）；会话级自由对话、真实系统接入与生产级风控在复赛推进。</a:t>
+              <a:t/>
             </a:r>
           </a:p>
         </p:txBody>
@@ -11273,7 +11275,1044 @@
                 <a:latin typeface="Microsoft YaHei"/>
                 <a:ea typeface="Microsoft YaHei"/>
               </a:rPr>
-              <a:t>13 / 13</a:t>
+              <a:t>13 / 14</a:t>
+            </a:r>
+          </a:p>
+        </p:txBody>
+      </p:sp>
+    </p:spTree>
+  </p:cSld>
+  <p:clrMapOvr>
+    <a:masterClrMapping/>
+  </p:clrMapOvr>
+</p:sld>
+</file>
+
+<file path=ppt/slides/slide14.xml><?xml version="1.0" encoding="utf-8"?>
+<p:sld xmlns:a="http://schemas.openxmlformats.org/drawingml/2006/main" xmlns:p="http://schemas.openxmlformats.org/presentationml/2006/main" xmlns:r="http://schemas.openxmlformats.org/officeDocument/2006/relationships">
+  <p:cSld>
+    <p:spTree>
+      <p:nvGrpSpPr>
+        <p:cNvPr id="1" name=""/>
+        <p:cNvGrpSpPr/>
+        <p:nvPr/>
+      </p:nvGrpSpPr>
+      <p:grpSpPr/>
+      <p:sp>
+        <p:nvSpPr>
+          <p:cNvPr id="2" name="Rectangle 1"/>
+          <p:cNvSpPr/>
+          <p:nvPr/>
+        </p:nvSpPr>
+        <p:spPr>
+          <a:xfrm>
+            <a:off x="0" y="0"/>
+            <a:ext cx="12191695" cy="6858000"/>
+          </a:xfrm>
+          <a:prstGeom prst="rect">
+            <a:avLst/>
+          </a:prstGeom>
+          <a:solidFill>
+            <a:srgbClr val="FFFFFF"/>
+          </a:solidFill>
+          <a:ln>
+            <a:noFill/>
+          </a:ln>
+          <a:effectLst/>
+        </p:spPr>
+        <p:style>
+          <a:lnRef idx="1">
+            <a:schemeClr val="accent1"/>
+          </a:lnRef>
+          <a:fillRef idx="3">
+            <a:schemeClr val="accent1"/>
+          </a:fillRef>
+          <a:effectRef idx="2">
+            <a:schemeClr val="accent1"/>
+          </a:effectRef>
+          <a:fontRef idx="minor">
+            <a:schemeClr val="lt1"/>
+          </a:fontRef>
+        </p:style>
+        <p:txBody>
+          <a:bodyPr rtlCol="0" anchor="ctr"/>
+          <a:lstStyle/>
+          <a:p>
+            <a:pPr algn="ctr"/>
+          </a:p>
+        </p:txBody>
+      </p:sp>
+      <p:sp>
+        <p:nvSpPr>
+          <p:cNvPr id="31" name="Rectangle 30"/>
+          <p:cNvSpPr/>
+          <p:nvPr/>
+        </p:nvSpPr>
+        <p:spPr>
+          <a:xfrm>
+            <a:off x="502920" y="6473952"/>
+            <a:ext cx="11185855" cy="10972"/>
+          </a:xfrm>
+          <a:prstGeom prst="rect">
+            <a:avLst/>
+          </a:prstGeom>
+          <a:solidFill>
+            <a:srgbClr val="E2E8F0"/>
+          </a:solidFill>
+          <a:ln>
+            <a:noFill/>
+          </a:ln>
+          <a:effectLst/>
+        </p:spPr>
+        <p:style>
+          <a:lnRef idx="1">
+            <a:schemeClr val="accent1"/>
+          </a:lnRef>
+          <a:fillRef idx="3">
+            <a:schemeClr val="accent1"/>
+          </a:fillRef>
+          <a:effectRef idx="2">
+            <a:schemeClr val="accent1"/>
+          </a:effectRef>
+          <a:fontRef idx="minor">
+            <a:schemeClr val="lt1"/>
+          </a:fontRef>
+        </p:style>
+        <p:txBody>
+          <a:bodyPr rtlCol="0" anchor="ctr"/>
+          <a:lstStyle/>
+          <a:p>
+            <a:pPr algn="ctr"/>
+          </a:p>
+        </p:txBody>
+      </p:sp>
+      <p:sp>
+        <p:nvSpPr>
+          <p:cNvPr id="32" name="TextBox 31"/>
+          <p:cNvSpPr txBox="1"/>
+          <p:nvPr/>
+        </p:nvSpPr>
+        <p:spPr>
+          <a:xfrm>
+            <a:off x="502920" y="6528816"/>
+            <a:ext cx="7772400" cy="274320"/>
+          </a:xfrm>
+          <a:prstGeom prst="rect">
+            <a:avLst/>
+          </a:prstGeom>
+          <a:noFill/>
+        </p:spPr>
+        <p:txBody>
+          <a:bodyPr wrap="square" anchor="t" lIns="0" rIns="0" tIns="0" bIns="0">
+            <a:spAutoFit/>
+          </a:bodyPr>
+          <a:lstStyle/>
+          <a:p>
+            <a:pPr algn="l">
+              <a:lnSpc>
+                <a:spcPct val="100000"/>
+              </a:lnSpc>
+              <a:spcBef>
+                <a:spcPts val="0"/>
+              </a:spcBef>
+              <a:spcAft>
+                <a:spcPts val="0"/>
+              </a:spcAft>
+            </a:pPr>
+            <a:r>
+              <a:rPr sz="900" b="0">
+                <a:solidFill>
+                  <a:srgbClr val="94A3B8"/>
+                </a:solidFill>
+                <a:latin typeface="Microsoft YaHei"/>
+                <a:ea typeface="Microsoft YaHei"/>
+              </a:rPr>
+              <a:t>SalesFlow · 基于多 Agent 的汽车销售自主成交智能助手 · 初赛方案</a:t>
+            </a:r>
+          </a:p>
+        </p:txBody>
+      </p:sp>
+      <p:sp>
+        <p:nvSpPr>
+          <p:cNvPr id="33" name="TextBox 32"/>
+          <p:cNvSpPr txBox="1"/>
+          <p:nvPr/>
+        </p:nvSpPr>
+        <p:spPr>
+          <a:xfrm>
+            <a:off x="502920" y="347472"/>
+            <a:ext cx="9692640" cy="502920"/>
+          </a:xfrm>
+          <a:prstGeom prst="rect">
+            <a:avLst/>
+          </a:prstGeom>
+          <a:noFill/>
+        </p:spPr>
+        <p:txBody>
+          <a:bodyPr wrap="square">
+            <a:spAutoFit/>
+          </a:bodyPr>
+          <a:lstStyle/>
+          <a:p>
+            <a:pPr algn="l">
+              <a:defRPr sz="1800" b="1">
+                <a:solidFill>
+                  <a:srgbClr val="2563EB"/>
+                </a:solidFill>
+                <a:latin typeface="Microsoft YaHei"/>
+              </a:defRPr>
+            </a:pPr>
+            <a:r>
+              <a:t>安全闭环：L0-L3 风险分级 × 审批门禁 × 回滚 × 审计</a:t>
+            </a:r>
+          </a:p>
+        </p:txBody>
+      </p:sp>
+      <p:sp>
+        <p:nvSpPr>
+          <p:cNvPr id="34" name="TextBox 33"/>
+          <p:cNvSpPr txBox="1"/>
+          <p:nvPr/>
+        </p:nvSpPr>
+        <p:spPr>
+          <a:xfrm>
+            <a:off x="10042855" y="384048"/>
+            <a:ext cx="1645920" cy="384048"/>
+          </a:xfrm>
+          <a:prstGeom prst="rect">
+            <a:avLst/>
+          </a:prstGeom>
+          <a:noFill/>
+        </p:spPr>
+        <p:txBody>
+          <a:bodyPr wrap="square">
+            <a:spAutoFit/>
+          </a:bodyPr>
+          <a:lstStyle/>
+          <a:p>
+            <a:pPr algn="r">
+              <a:defRPr sz="900" b="1">
+                <a:solidFill>
+                  <a:srgbClr val="2563EB"/>
+                </a:solidFill>
+                <a:latin typeface="Microsoft YaHei"/>
+              </a:defRPr>
+            </a:pPr>
+            <a:r>
+              <a:t>SECURITY</a:t>
+            </a:r>
+          </a:p>
+        </p:txBody>
+      </p:sp>
+      <p:sp>
+        <p:nvSpPr>
+          <p:cNvPr id="35" name="TextBox 34"/>
+          <p:cNvSpPr txBox="1"/>
+          <p:nvPr/>
+        </p:nvSpPr>
+        <p:spPr>
+          <a:xfrm>
+            <a:off x="502920" y="1042415"/>
+            <a:ext cx="11155680" cy="320040"/>
+          </a:xfrm>
+          <a:prstGeom prst="rect">
+            <a:avLst/>
+          </a:prstGeom>
+          <a:noFill/>
+        </p:spPr>
+        <p:txBody>
+          <a:bodyPr wrap="square">
+            <a:spAutoFit/>
+          </a:bodyPr>
+          <a:lstStyle/>
+          <a:p>
+            <a:pPr algn="l">
+              <a:defRPr sz="1100" b="0">
+                <a:solidFill>
+                  <a:srgbClr val="64748B"/>
+                </a:solidFill>
+                <a:latin typeface="Microsoft YaHei"/>
+              </a:defRPr>
+            </a:pPr>
+            <a:r>
+              <a:t>高风险动作禁止默认放行——LLM 自主推理 + 决策与执行分离 + append-only 审计轨迹</a:t>
+            </a:r>
+          </a:p>
+        </p:txBody>
+      </p:sp>
+      <p:graphicFrame>
+        <p:nvGraphicFramePr>
+          <p:cNvPr id="36" name="Table 35"/>
+          <p:cNvGraphicFramePr>
+            <a:graphicFrameLocks noGrp="1"/>
+          </p:cNvGraphicFramePr>
+          <p:nvPr/>
+        </p:nvGraphicFramePr>
+        <p:xfrm>
+          <a:off x="502920" y="1554480"/>
+          <a:ext cx="5562600" cy="1645920"/>
+        </p:xfrm>
+        <a:graphic>
+          <a:graphicData uri="http://schemas.openxmlformats.org/drawingml/2006/table">
+            <a:tbl>
+              <a:tblPr firstRow="1" bandRow="1">
+                <a:tableStyleId>{5C22544A-7EE6-4342-B048-85BDC9FD1C3A}</a:tableStyleId>
+              </a:tblPr>
+              <a:tblGrid>
+                <a:gridCol w="822960"/>
+                <a:gridCol w="2560320"/>
+                <a:gridCol w="2179320"/>
+              </a:tblGrid>
+              <a:tr h="329184">
+                <a:tc>
+                  <a:txBody>
+                    <a:bodyPr/>
+                    <a:lstStyle/>
+                    <a:p>
+                      <a:pPr>
+                        <a:defRPr sz="1000" b="1">
+                          <a:solidFill>
+                            <a:srgbClr val="FFFFFF"/>
+                          </a:solidFill>
+                          <a:latin typeface="Microsoft YaHei"/>
+                        </a:defRPr>
+                      </a:pPr>
+                      <a:r>
+                        <a:t>风险等级</a:t>
+                      </a:r>
+                    </a:p>
+                  </a:txBody>
+                  <a:tcPr>
+                    <a:solidFill>
+                      <a:srgbClr val="2563EB"/>
+                    </a:solidFill>
+                  </a:tcPr>
+                </a:tc>
+                <a:tc>
+                  <a:txBody>
+                    <a:bodyPr/>
+                    <a:lstStyle/>
+                    <a:p>
+                      <a:pPr>
+                        <a:defRPr sz="1000" b="1">
+                          <a:solidFill>
+                            <a:srgbClr val="FFFFFF"/>
+                          </a:solidFill>
+                          <a:latin typeface="Microsoft YaHei"/>
+                        </a:defRPr>
+                      </a:pPr>
+                      <a:r>
+                        <a:t>动作类型</a:t>
+                      </a:r>
+                    </a:p>
+                  </a:txBody>
+                  <a:tcPr>
+                    <a:solidFill>
+                      <a:srgbClr val="2563EB"/>
+                    </a:solidFill>
+                  </a:tcPr>
+                </a:tc>
+                <a:tc>
+                  <a:txBody>
+                    <a:bodyPr/>
+                    <a:lstStyle/>
+                    <a:p>
+                      <a:pPr>
+                        <a:defRPr sz="1000" b="1">
+                          <a:solidFill>
+                            <a:srgbClr val="FFFFFF"/>
+                          </a:solidFill>
+                          <a:latin typeface="Microsoft YaHei"/>
+                        </a:defRPr>
+                      </a:pPr>
+                      <a:r>
+                        <a:t>处置策略</a:t>
+                      </a:r>
+                    </a:p>
+                  </a:txBody>
+                  <a:tcPr>
+                    <a:solidFill>
+                      <a:srgbClr val="2563EB"/>
+                    </a:solidFill>
+                  </a:tcPr>
+                </a:tc>
+              </a:tr>
+              <a:tr h="329184">
+                <a:tc>
+                  <a:txBody>
+                    <a:bodyPr/>
+                    <a:lstStyle/>
+                    <a:p>
+                      <a:pPr>
+                        <a:defRPr sz="900" b="1">
+                          <a:solidFill>
+                            <a:srgbClr val="16A34A"/>
+                          </a:solidFill>
+                          <a:latin typeface="Microsoft YaHei"/>
+                        </a:defRPr>
+                      </a:pPr>
+                      <a:r>
+                        <a:t>L0 自动</a:t>
+                      </a:r>
+                    </a:p>
+                  </a:txBody>
+                  <a:tcPr>
+                    <a:solidFill>
+                      <a:srgbClr val="F8FAFC"/>
+                    </a:solidFill>
+                  </a:tcPr>
+                </a:tc>
+                <a:tc>
+                  <a:txBody>
+                    <a:bodyPr/>
+                    <a:lstStyle/>
+                    <a:p>
+                      <a:pPr>
+                        <a:defRPr sz="900">
+                          <a:solidFill>
+                            <a:srgbClr val="1E293B"/>
+                          </a:solidFill>
+                          <a:latin typeface="Microsoft YaHei"/>
+                        </a:defRPr>
+                      </a:pPr>
+                      <a:r>
+                        <a:t>线索归集 / 画像 / 意图 / 策略</a:t>
+                      </a:r>
+                    </a:p>
+                  </a:txBody>
+                  <a:tcPr>
+                    <a:solidFill>
+                      <a:srgbClr val="F8FAFC"/>
+                    </a:solidFill>
+                  </a:tcPr>
+                </a:tc>
+                <a:tc>
+                  <a:txBody>
+                    <a:bodyPr/>
+                    <a:lstStyle/>
+                    <a:p>
+                      <a:pPr>
+                        <a:defRPr sz="900">
+                          <a:solidFill>
+                            <a:srgbClr val="1E293B"/>
+                          </a:solidFill>
+                          <a:latin typeface="Microsoft YaHei"/>
+                        </a:defRPr>
+                      </a:pPr>
+                      <a:r>
+                        <a:t>自动执行，无需审批</a:t>
+                      </a:r>
+                    </a:p>
+                  </a:txBody>
+                  <a:tcPr>
+                    <a:solidFill>
+                      <a:srgbClr val="F8FAFC"/>
+                    </a:solidFill>
+                  </a:tcPr>
+                </a:tc>
+              </a:tr>
+              <a:tr h="329184">
+                <a:tc>
+                  <a:txBody>
+                    <a:bodyPr/>
+                    <a:lstStyle/>
+                    <a:p>
+                      <a:pPr>
+                        <a:defRPr sz="900" b="1">
+                          <a:solidFill>
+                            <a:srgbClr val="0891A2"/>
+                          </a:solidFill>
+                          <a:latin typeface="Microsoft YaHei"/>
+                        </a:defRPr>
+                      </a:pPr>
+                      <a:r>
+                        <a:t>L1 通知</a:t>
+                      </a:r>
+                    </a:p>
+                  </a:txBody>
+                  <a:tcPr>
+                    <a:solidFill>
+                      <a:srgbClr val="F8FAFC"/>
+                    </a:solidFill>
+                  </a:tcPr>
+                </a:tc>
+                <a:tc>
+                  <a:txBody>
+                    <a:bodyPr/>
+                    <a:lstStyle/>
+                    <a:p>
+                      <a:pPr>
+                        <a:defRPr sz="900">
+                          <a:solidFill>
+                            <a:srgbClr val="1E293B"/>
+                          </a:solidFill>
+                          <a:latin typeface="Microsoft YaHei"/>
+                        </a:defRPr>
+                      </a:pPr>
+                      <a:r>
+                        <a:t>试驾预约 / 优惠匹配(授权内)</a:t>
+                      </a:r>
+                    </a:p>
+                  </a:txBody>
+                  <a:tcPr>
+                    <a:solidFill>
+                      <a:srgbClr val="F8FAFC"/>
+                    </a:solidFill>
+                  </a:tcPr>
+                </a:tc>
+                <a:tc>
+                  <a:txBody>
+                    <a:bodyPr/>
+                    <a:lstStyle/>
+                    <a:p>
+                      <a:pPr>
+                        <a:defRPr sz="900">
+                          <a:solidFill>
+                            <a:srgbClr val="1E293B"/>
+                          </a:solidFill>
+                          <a:latin typeface="Microsoft YaHei"/>
+                        </a:defRPr>
+                      </a:pPr>
+                      <a:r>
+                        <a:t>自动执行 + 通知留痕</a:t>
+                      </a:r>
+                    </a:p>
+                  </a:txBody>
+                  <a:tcPr>
+                    <a:solidFill>
+                      <a:srgbClr val="F8FAFC"/>
+                    </a:solidFill>
+                  </a:tcPr>
+                </a:tc>
+              </a:tr>
+              <a:tr h="329184">
+                <a:tc>
+                  <a:txBody>
+                    <a:bodyPr/>
+                    <a:lstStyle/>
+                    <a:p>
+                      <a:pPr>
+                        <a:defRPr sz="900" b="1">
+                          <a:solidFill>
+                            <a:srgbClr val="EA580C"/>
+                          </a:solidFill>
+                          <a:latin typeface="Microsoft YaHei"/>
+                        </a:defRPr>
+                      </a:pPr>
+                      <a:r>
+                        <a:t>L2 审批</a:t>
+                      </a:r>
+                    </a:p>
+                  </a:txBody>
+                  <a:tcPr>
+                    <a:solidFill>
+                      <a:srgbClr val="F8FAFC"/>
+                    </a:solidFill>
+                  </a:tcPr>
+                </a:tc>
+                <a:tc>
+                  <a:txBody>
+                    <a:bodyPr/>
+                    <a:lstStyle/>
+                    <a:p>
+                      <a:pPr>
+                        <a:defRPr sz="900">
+                          <a:solidFill>
+                            <a:srgbClr val="1E293B"/>
+                          </a:solidFill>
+                          <a:latin typeface="Microsoft YaHei"/>
+                        </a:defRPr>
+                      </a:pPr>
+                      <a:r>
+                        <a:t>超授权优惠 / 征信 / 订单确认</a:t>
+                      </a:r>
+                    </a:p>
+                  </a:txBody>
+                  <a:tcPr>
+                    <a:solidFill>
+                      <a:srgbClr val="F8FAFC"/>
+                    </a:solidFill>
+                  </a:tcPr>
+                </a:tc>
+                <a:tc>
+                  <a:txBody>
+                    <a:bodyPr/>
+                    <a:lstStyle/>
+                    <a:p>
+                      <a:pPr>
+                        <a:defRPr sz="900">
+                          <a:solidFill>
+                            <a:srgbClr val="1E293B"/>
+                          </a:solidFill>
+                          <a:latin typeface="Microsoft YaHei"/>
+                        </a:defRPr>
+                      </a:pPr>
+                      <a:r>
+                        <a:t>LLM 审批 approve/reject/pending</a:t>
+                      </a:r>
+                    </a:p>
+                  </a:txBody>
+                  <a:tcPr>
+                    <a:solidFill>
+                      <a:srgbClr val="F8FAFC"/>
+                    </a:solidFill>
+                  </a:tcPr>
+                </a:tc>
+              </a:tr>
+              <a:tr h="329184">
+                <a:tc>
+                  <a:txBody>
+                    <a:bodyPr/>
+                    <a:lstStyle/>
+                    <a:p>
+                      <a:pPr>
+                        <a:defRPr sz="900" b="1">
+                          <a:solidFill>
+                            <a:srgbClr val="DC2626"/>
+                          </a:solidFill>
+                          <a:latin typeface="Microsoft YaHei"/>
+                        </a:defRPr>
+                      </a:pPr>
+                      <a:r>
+                        <a:t>L3 人工</a:t>
+                      </a:r>
+                    </a:p>
+                  </a:txBody>
+                  <a:tcPr>
+                    <a:solidFill>
+                      <a:srgbClr val="F8FAFC"/>
+                    </a:solidFill>
+                  </a:tcPr>
+                </a:tc>
+                <a:tc>
+                  <a:txBody>
+                    <a:bodyPr/>
+                    <a:lstStyle/>
+                    <a:p>
+                      <a:pPr>
+                        <a:defRPr sz="900">
+                          <a:solidFill>
+                            <a:srgbClr val="1E293B"/>
+                          </a:solidFill>
+                          <a:latin typeface="Microsoft YaHei"/>
+                        </a:defRPr>
+                      </a:pPr>
+                      <a:r>
+                        <a:t>合同签署 / 大额退款</a:t>
+                      </a:r>
+                    </a:p>
+                  </a:txBody>
+                  <a:tcPr>
+                    <a:solidFill>
+                      <a:srgbClr val="F8FAFC"/>
+                    </a:solidFill>
+                  </a:tcPr>
+                </a:tc>
+                <a:tc>
+                  <a:txBody>
+                    <a:bodyPr/>
+                    <a:lstStyle/>
+                    <a:p>
+                      <a:pPr>
+                        <a:defRPr sz="900">
+                          <a:solidFill>
+                            <a:srgbClr val="1E293B"/>
+                          </a:solidFill>
+                          <a:latin typeface="Microsoft YaHei"/>
+                        </a:defRPr>
+                      </a:pPr>
+                      <a:r>
+                        <a:t>人工确认 + 双签</a:t>
+                      </a:r>
+                    </a:p>
+                  </a:txBody>
+                  <a:tcPr>
+                    <a:solidFill>
+                      <a:srgbClr val="F8FAFC"/>
+                    </a:solidFill>
+                  </a:tcPr>
+                </a:tc>
+              </a:tr>
+            </a:tbl>
+          </a:graphicData>
+        </a:graphic>
+      </p:graphicFrame>
+      <p:sp>
+        <p:nvSpPr>
+          <p:cNvPr id="37" name="Rounded Rectangle 36"/>
+          <p:cNvSpPr/>
+          <p:nvPr/>
+        </p:nvSpPr>
+        <p:spPr>
+          <a:xfrm>
+            <a:off x="6245352" y="1554480"/>
+            <a:ext cx="5440680" cy="1645920"/>
+          </a:xfrm>
+          <a:prstGeom prst="roundRect">
+            <a:avLst/>
+          </a:prstGeom>
+          <a:solidFill>
+            <a:srgbClr val="FFFFFF"/>
+          </a:solidFill>
+          <a:ln>
+            <a:noFill/>
+          </a:ln>
+          <a:effectLst/>
+        </p:spPr>
+        <p:style>
+          <a:lnRef idx="1">
+            <a:schemeClr val="accent1"/>
+          </a:lnRef>
+          <a:fillRef idx="3">
+            <a:schemeClr val="accent1"/>
+          </a:fillRef>
+          <a:effectRef idx="2">
+            <a:schemeClr val="accent1"/>
+          </a:effectRef>
+          <a:fontRef idx="minor">
+            <a:schemeClr val="lt1"/>
+          </a:fontRef>
+        </p:style>
+        <p:txBody>
+          <a:bodyPr rtlCol="0" anchor="ctr"/>
+          <a:lstStyle/>
+          <a:p>
+            <a:pPr algn="ctr"/>
+          </a:p>
+        </p:txBody>
+      </p:sp>
+      <p:sp>
+        <p:nvSpPr>
+          <p:cNvPr id="38" name="TextBox 37"/>
+          <p:cNvSpPr txBox="1"/>
+          <p:nvPr/>
+        </p:nvSpPr>
+        <p:spPr>
+          <a:xfrm>
+            <a:off x="6473952" y="1737360"/>
+            <a:ext cx="4983480" cy="1280160"/>
+          </a:xfrm>
+          <a:prstGeom prst="rect">
+            <a:avLst/>
+          </a:prstGeom>
+          <a:noFill/>
+        </p:spPr>
+        <p:txBody>
+          <a:bodyPr wrap="square">
+            <a:spAutoFit/>
+          </a:bodyPr>
+          <a:lstStyle/>
+          <a:p>
+            <a:pPr algn="l">
+              <a:defRPr sz="900" b="0">
+                <a:solidFill>
+                  <a:srgbClr val="1E293B"/>
+                </a:solidFill>
+                <a:latin typeface="Microsoft YaHei"/>
+              </a:defRPr>
+            </a:pPr>
+            <a:r>
+              <a:t>三安全分支（端到端验证）</a:t>
+            </a:r>
+            <a:br/>
+            <a:r>
+              <a:t>① DEAL-2001 reject → rollback_order（rolled_back）</a:t>
+            </a:r>
+            <a:br/>
+            <a:r>
+              <a:t>    超授权优惠 8.5 折→LLM 推理 reject→订单回滚</a:t>
+            </a:r>
+            <a:br/>
+            <a:r>
+              <a:t>② DEAL-2002 approve → confirm_order（won）</a:t>
+            </a:r>
+            <a:br/>
+            <a:r>
+              <a:t>    征信审批→LLM 推理 approve→订单确认→成交</a:t>
+            </a:r>
+            <a:br/>
+            <a:r>
+              <a:t>③ DEAL-2003 pending → human_handoff</a:t>
+            </a:r>
+            <a:br/>
+            <a:r>
+              <a:t>    预算未明→LLM 推理 pending→转人工（禁止默认放行）</a:t>
+            </a:r>
+          </a:p>
+        </p:txBody>
+      </p:sp>
+      <p:sp>
+        <p:nvSpPr>
+          <p:cNvPr id="39" name="Rounded Rectangle 38"/>
+          <p:cNvSpPr/>
+          <p:nvPr/>
+        </p:nvSpPr>
+        <p:spPr>
+          <a:xfrm>
+            <a:off x="502920" y="3310128"/>
+            <a:ext cx="5562600" cy="1371600"/>
+          </a:xfrm>
+          <a:prstGeom prst="roundRect">
+            <a:avLst/>
+          </a:prstGeom>
+          <a:solidFill>
+            <a:srgbClr val="FFFFFF"/>
+          </a:solidFill>
+          <a:ln>
+            <a:noFill/>
+          </a:ln>
+          <a:effectLst/>
+        </p:spPr>
+        <p:style>
+          <a:lnRef idx="1">
+            <a:schemeClr val="accent1"/>
+          </a:lnRef>
+          <a:fillRef idx="3">
+            <a:schemeClr val="accent1"/>
+          </a:fillRef>
+          <a:effectRef idx="2">
+            <a:schemeClr val="accent1"/>
+          </a:effectRef>
+          <a:fontRef idx="minor">
+            <a:schemeClr val="lt1"/>
+          </a:fontRef>
+        </p:style>
+        <p:txBody>
+          <a:bodyPr rtlCol="0" anchor="ctr"/>
+          <a:lstStyle/>
+          <a:p>
+            <a:pPr algn="ctr"/>
+          </a:p>
+        </p:txBody>
+      </p:sp>
+      <p:sp>
+        <p:nvSpPr>
+          <p:cNvPr id="40" name="TextBox 39"/>
+          <p:cNvSpPr txBox="1"/>
+          <p:nvPr/>
+        </p:nvSpPr>
+        <p:spPr>
+          <a:xfrm>
+            <a:off x="731520" y="3493008"/>
+            <a:ext cx="5029200" cy="1005840"/>
+          </a:xfrm>
+          <a:prstGeom prst="rect">
+            <a:avLst/>
+          </a:prstGeom>
+          <a:noFill/>
+        </p:spPr>
+        <p:txBody>
+          <a:bodyPr wrap="square">
+            <a:spAutoFit/>
+          </a:bodyPr>
+          <a:lstStyle/>
+          <a:p>
+            <a:pPr algn="l">
+              <a:defRPr sz="900" b="0">
+                <a:solidFill>
+                  <a:srgbClr val="1E293B"/>
+                </a:solidFill>
+                <a:latin typeface="Microsoft YaHei"/>
+              </a:defRPr>
+            </a:pPr>
+            <a:r>
+              <a:t>三个 LLM 自主决策点（百炼 qwen-plus）</a:t>
+            </a:r>
+            <a:br/>
+            <a:r>
+              <a:t>① 审批门禁：approve/reject/pending（忠实上下文，不操纵）</a:t>
+            </a:r>
+            <a:br/>
+            <a:r>
+              <a:t>② 车型推荐：fit_confidence + risk_flag（DEAL-2002 诚实标 mismatch）</a:t>
+            </a:r>
+            <a:br/>
+            <a:r>
+              <a:t>③ 工具调用顺序：4 工具先后由 LLM 自主规划</a:t>
+            </a:r>
+            <a:br/>
+            <a:r>
+              <a:t>    DEAL-2003 把 get_policy 提前到 check_stock 之前</a:t>
+            </a:r>
+            <a:br/>
+            <a:r>
+              <a:t>decision_source 诚实标注 llm / fallback_config</a:t>
+            </a:r>
+          </a:p>
+        </p:txBody>
+      </p:sp>
+      <p:sp>
+        <p:nvSpPr>
+          <p:cNvPr id="41" name="Rounded Rectangle 40"/>
+          <p:cNvSpPr/>
+          <p:nvPr/>
+        </p:nvSpPr>
+        <p:spPr>
+          <a:xfrm>
+            <a:off x="6245352" y="3310128"/>
+            <a:ext cx="5440680" cy="1371600"/>
+          </a:xfrm>
+          <a:prstGeom prst="roundRect">
+            <a:avLst/>
+          </a:prstGeom>
+          <a:solidFill>
+            <a:srgbClr val="FFFFFF"/>
+          </a:solidFill>
+          <a:ln>
+            <a:noFill/>
+          </a:ln>
+          <a:effectLst/>
+        </p:spPr>
+        <p:style>
+          <a:lnRef idx="1">
+            <a:schemeClr val="accent1"/>
+          </a:lnRef>
+          <a:fillRef idx="3">
+            <a:schemeClr val="accent1"/>
+          </a:fillRef>
+          <a:effectRef idx="2">
+            <a:schemeClr val="accent1"/>
+          </a:effectRef>
+          <a:fontRef idx="minor">
+            <a:schemeClr val="lt1"/>
+          </a:fontRef>
+        </p:style>
+        <p:txBody>
+          <a:bodyPr rtlCol="0" anchor="ctr"/>
+          <a:lstStyle/>
+          <a:p>
+            <a:pPr algn="ctr"/>
+          </a:p>
+        </p:txBody>
+      </p:sp>
+      <p:sp>
+        <p:nvSpPr>
+          <p:cNvPr id="42" name="TextBox 41"/>
+          <p:cNvSpPr txBox="1"/>
+          <p:nvPr/>
+        </p:nvSpPr>
+        <p:spPr>
+          <a:xfrm>
+            <a:off x="6473952" y="3493008"/>
+            <a:ext cx="4983480" cy="1005840"/>
+          </a:xfrm>
+          <a:prstGeom prst="rect">
+            <a:avLst/>
+          </a:prstGeom>
+          <a:noFill/>
+        </p:spPr>
+        <p:txBody>
+          <a:bodyPr wrap="square">
+            <a:spAutoFit/>
+          </a:bodyPr>
+          <a:lstStyle/>
+          <a:p>
+            <a:pPr algn="l">
+              <a:defRPr sz="900" b="0">
+                <a:solidFill>
+                  <a:srgbClr val="1E293B"/>
+                </a:solidFill>
+                <a:latin typeface="Microsoft YaHei"/>
+              </a:defRPr>
+            </a:pPr>
+            <a:r>
+              <a:t>append-only 审计轨迹</a:t>
+            </a:r>
+            <a:br/>
+            <a:r>
+              <a:t>· 6/4/4 条 action（DEAL-2001/2002/2003）</a:t>
+            </a:r>
+            <a:br/>
+            <a:r>
+              <a:t>· 全量 trace_id 关联，可按 approval_id / order_id 筛选</a:t>
+            </a:r>
+            <a:br/>
+            <a:r>
+              <a:t>· 重启不丢失（JSONL 持久化 + OSS 归档）</a:t>
+            </a:r>
+            <a:br/>
+            <a:r>
+              <a:t>· OTel 运行时 39 span + 重放 95 span（GenAI semconv）</a:t>
+            </a:r>
+            <a:br/>
+            <a:r>
+              <a:t>· 决策与执行分离：reject 只标记 rollback_requested</a:t>
+            </a:r>
+            <a:br/>
+            <a:r>
+              <a:t>    由执行层显式 rollback_order</a:t>
+            </a:r>
+          </a:p>
+        </p:txBody>
+      </p:sp>
+      <p:sp>
+        <p:nvSpPr>
+          <p:cNvPr id="43" name="TextBox 42"/>
+          <p:cNvSpPr txBox="1"/>
+          <p:nvPr/>
+        </p:nvSpPr>
+        <p:spPr>
+          <a:xfrm>
+            <a:off x="731520" y="4831040"/>
+            <a:ext cx="10789920" cy="658368"/>
+          </a:xfrm>
+          <a:prstGeom prst="rect">
+            <a:avLst/>
+          </a:prstGeom>
+          <a:noFill/>
+        </p:spPr>
+        <p:txBody>
+          <a:bodyPr wrap="square">
+            <a:spAutoFit/>
+          </a:bodyPr>
+          <a:lstStyle/>
+          <a:p>
+            <a:pPr algn="l">
+              <a:defRPr sz="900" b="0">
+                <a:solidFill>
+                  <a:srgbClr val="64748B"/>
+                </a:solidFill>
+                <a:latin typeface="Microsoft YaHei"/>
+              </a:defRPr>
+            </a:pPr>
+            <a:r>
+              <a:t>安全设计原则：决策与执行分离 · 高风险禁止默认放行 · 审计 append-only 可回溯 · LLM 忠实上下文不操纵决策方向 · 无 key 降级 fallback_config 仍 ALL PASS</a:t>
+            </a:r>
+          </a:p>
+        </p:txBody>
+      </p:sp>
+      <p:sp>
+        <p:nvSpPr>
+          <p:cNvPr id="44" name="TextBox 43"/>
+          <p:cNvSpPr txBox="1"/>
+          <p:nvPr/>
+        </p:nvSpPr>
+        <p:spPr>
+          <a:xfrm>
+            <a:off x="10774375" y="6528816"/>
+            <a:ext cx="914400" cy="274320"/>
+          </a:xfrm>
+          <a:prstGeom prst="rect">
+            <a:avLst/>
+          </a:prstGeom>
+          <a:noFill/>
+        </p:spPr>
+        <p:txBody>
+          <a:bodyPr wrap="square">
+            <a:spAutoFit/>
+          </a:bodyPr>
+          <a:lstStyle/>
+          <a:p>
+            <a:pPr algn="r">
+              <a:defRPr sz="900" b="0">
+                <a:solidFill>
+                  <a:srgbClr val="64748B"/>
+                </a:solidFill>
+                <a:latin typeface="Microsoft YaHei"/>
+              </a:defRPr>
+            </a:pPr>
+            <a:r>
+              <a:t>14 / 14</a:t>
             </a:r>
           </a:p>
         </p:txBody>
@@ -13419,7 +14458,7 @@
                 <a:latin typeface="Microsoft YaHei"/>
                 <a:ea typeface="Microsoft YaHei"/>
               </a:rPr>
-              <a:t>02 / 13</a:t>
+              <a:t>02 / 14</a:t>
             </a:r>
           </a:p>
         </p:txBody>
@@ -15153,7 +16192,7 @@
                 <a:latin typeface="Microsoft YaHei"/>
                 <a:ea typeface="Microsoft YaHei"/>
               </a:rPr>
-              <a:t>03 / 13</a:t>
+              <a:t>03 / 14</a:t>
             </a:r>
           </a:p>
         </p:txBody>
@@ -17180,7 +18219,7 @@
                 <a:latin typeface="Microsoft YaHei"/>
                 <a:ea typeface="Microsoft YaHei"/>
               </a:rPr>
-              <a:t>Manager 创建 8 个职能 Worker 与独立 TeamLeader Worker（salesflow-demo-leader），在 Team 房间接收任务；TeamLeader 拆解调度，Worker 专注执行，Human-in-the-loop 随时可介入。</a:t>
+              <a:t>Manager 创建 8 个职能 Worker 与独立 TeamLeader Worker（carsales-demo-leader），在 Team 房间接收任务；TeamLeader 拆解调度，Worker 专注执行，Human-in-the-loop 随时可介入。</a:t>
             </a:r>
           </a:p>
         </p:txBody>
@@ -17316,7 +18355,7 @@
                 <a:latin typeface="Microsoft YaHei"/>
                 <a:ea typeface="Microsoft YaHei"/>
               </a:rPr>
-              <a:t>04 / 13</a:t>
+              <a:t>04 / 14</a:t>
             </a:r>
           </a:p>
         </p:txBody>
@@ -17650,7 +18689,7 @@
                 <a:latin typeface="Microsoft YaHei"/>
                 <a:ea typeface="Microsoft YaHei"/>
               </a:rPr>
-              <a:t>以 family_suv_deal 场景展示任务级自主闭环（3 场景全部通过 selfcheck 36/36 断言）</a:t>
+              <a:t>以 family_suv_deal 场景展示任务级自主闭环（3 场景全部通过 selfcheck 56/56 断言）</a:t>
             </a:r>
           </a:p>
         </p:txBody>
@@ -20054,7 +21093,43 @@
                 <a:latin typeface="Microsoft YaHei"/>
                 <a:ea typeface="Microsoft YaHei"/>
               </a:rPr>
-              <a:t>05 / 13</a:t>
+              <a:t>05 / 14</a:t>
+            </a:r>
+          </a:p>
+        </p:txBody>
+      </p:sp>
+      <p:sp>
+        <p:nvSpPr>
+          <p:cNvPr id="61" name="TextBox 60"/>
+          <p:cNvSpPr txBox="1"/>
+          <p:nvPr/>
+        </p:nvSpPr>
+        <p:spPr>
+          <a:xfrm>
+            <a:off x="502920" y="5900000"/>
+            <a:ext cx="11155680" cy="384048"/>
+          </a:xfrm>
+          <a:prstGeom prst="rect">
+            <a:avLst/>
+          </a:prstGeom>
+          <a:noFill/>
+        </p:spPr>
+        <p:txBody>
+          <a:bodyPr wrap="square">
+            <a:spAutoFit/>
+          </a:bodyPr>
+          <a:lstStyle/>
+          <a:p>
+            <a:pPr>
+              <a:defRPr sz="700">
+                <a:solidFill>
+                  <a:srgbClr val="64748B"/>
+                </a:solidFill>
+                <a:latin typeface="Microsoft YaHei"/>
+              </a:defRPr>
+            </a:pPr>
+            <a:r>
+              <a:t>Agent → Skill 映射：lead-intake→lead-fusion / profile-builder→profile-building / intent-analyst→intent-scoring / strategy-planner→car-recommendation+quote-pricing / negotiation-executor→negotiation-guard / order-executor→order-safe-execute / knowledge-miner→case-mining+deal-memory</a:t>
             </a:r>
           </a:p>
         </p:txBody>
@@ -20504,7 +21579,7 @@
                           <a:latin typeface="Microsoft YaHei"/>
                           <a:ea typeface="Microsoft YaHei"/>
                         </a:rPr>
-                        <a:t>Manager 通过 create_agent 串行创建 8 个职能 Worker + 独立 TeamLeader Worker（salesflow-demo-leader），create_team 组建 salesflow-demo Team，对应框架 Manager → TeamLeader → Worker 分层语义</a:t>
+                        <a:t>Manager 通过 create_agent 串行创建 8 个职能 Worker + 独立 TeamLeader Worker（carsales-demo-leader），create_team 组建 carsales-demo Team，对应框架 Manager → TeamLeader → Worker 分层语义</a:t>
                       </a:r>
                     </a:p>
                   </a:txBody>
@@ -20900,7 +21975,7 @@
                 <a:latin typeface="Microsoft YaHei"/>
                 <a:ea typeface="Microsoft YaHei"/>
               </a:rPr>
-              <a:t>06 / 13</a:t>
+              <a:t>06 / 14</a:t>
             </a:r>
           </a:p>
         </p:txBody>
@@ -22949,7 +24024,7 @@
                 <a:latin typeface="Microsoft YaHei"/>
                 <a:ea typeface="Microsoft YaHei"/>
               </a:rPr>
-              <a:t>复用价值：每个 Skill 按 10 字段模板定义（含调用条件 / 依赖工具 / 权限与安全 / 复用价值），可跨 Agent、跨场景复用，支持版本化与灰度发布（Nacos AI Registry）。</a:t>
+              <a:t>复用价值：每个 Skill 按 10 字段模板定义（含调用条件 / 依赖工具 / 权限与安全 / 复用价值），可跨 Agent、跨场景复用，支持版本化与灰度发布（Nacos AI Registry）。（完整定义见附录 B）</a:t>
             </a:r>
           </a:p>
         </p:txBody>
@@ -23085,7 +24160,7 @@
                 <a:latin typeface="Microsoft YaHei"/>
                 <a:ea typeface="Microsoft YaHei"/>
               </a:rPr>
-              <a:t>07 / 13</a:t>
+              <a:t>07 / 14</a:t>
             </a:r>
           </a:p>
         </p:txBody>
@@ -24754,7 +25829,7 @@
                 <a:latin typeface="Microsoft YaHei"/>
                 <a:ea typeface="Microsoft YaHei"/>
               </a:rPr>
-              <a:t>08 / 13</a:t>
+              <a:t>08 / 14</a:t>
             </a:r>
           </a:p>
         </p:txBody>
@@ -25801,7 +26876,7 @@
                 <a:latin typeface="Microsoft YaHei"/>
                 <a:ea typeface="Microsoft YaHei"/>
               </a:rPr>
-              <a:t>连接知识库与，业务数据</a:t>
+              <a:t>连接知识库与业务数据</a:t>
             </a:r>
           </a:p>
         </p:txBody>
@@ -25870,7 +26945,7 @@
                 <a:latin typeface="Microsoft YaHei"/>
                 <a:ea typeface="Microsoft YaHei"/>
               </a:rPr>
-              <a:t>证据对齐，与结果写入</a:t>
+              <a:t>证据对齐与结果写入</a:t>
             </a:r>
           </a:p>
         </p:txBody>
@@ -25939,7 +27014,7 @@
                 <a:latin typeface="Microsoft YaHei"/>
                 <a:ea typeface="Microsoft YaHei"/>
               </a:rPr>
-              <a:t>评估证据是否，足以支撑结论</a:t>
+              <a:t>评估证据是否足以支撑结论</a:t>
             </a:r>
           </a:p>
         </p:txBody>
@@ -26179,7 +27254,7 @@
                 <a:latin typeface="Microsoft YaHei"/>
                 <a:ea typeface="Microsoft YaHei"/>
               </a:rPr>
-              <a:t>09 / 13</a:t>
+              <a:t>09 / 14</a:t>
             </a:r>
           </a:p>
         </p:txBody>

--- a/ppt和作品简介/基于多Agent的汽车销售自主成交智能助手-初赛方案.pptx
+++ b/ppt和作品简介/基于多Agent的汽车销售自主成交智能助手-初赛方案.pptx
@@ -5589,7 +5589,7 @@
                 <a:latin typeface="Microsoft YaHei"/>
                 <a:ea typeface="Microsoft YaHei"/>
               </a:rPr>
-              <a:t>覆盖 Agent 推理、Skill 调用、工具执行与 RAG 检索的全链路推理轨迹</a:t>
+              <a:t>自主成交的关键不是无限自动化，而是让每一步可验证、可审计、可回放</a:t>
             </a:r>
           </a:p>
         </p:txBody>
@@ -10655,7 +10655,7 @@
                 <a:latin typeface="Microsoft YaHei"/>
                 <a:ea typeface="Microsoft YaHei"/>
               </a:rPr>
-              <a:t>✓ 自检 56/56 + 编排 G1/G2/G3 + 三个 LLM 决策点(审批三安全分支+车型推荐+工具顺序) + OTel 运行时 39 span + 重放 95 span + OSS REST 签名验证 + RAG/记忆 + 评估 1.0</a:t>
+              <a:t>✓ 可复现证据：自检 56/56 断言 + 三个 LLM 决策点（审批三安全分支 / 车型推荐 / 工具顺序）+ 全链路 Trace 留痕 + 评估得分 1.0</a:t>
             </a:r>
           </a:p>
           <a:p>
@@ -11129,7 +11129,7 @@
                 <a:latin typeface="Microsoft YaHei"/>
                 <a:ea typeface="Microsoft YaHei"/>
               </a:rPr>
-              <a:t>边界声明：初赛聚焦 mock 环境任务级自主闭环（方案设计+可复现断言+三个 LLM 决策点已驱动+OTel 运行时插桩+OSS REST 签名验证+AgentTeams 真框架已跑）；会话级自由对话、真实系统接入、生产级风控在复赛推进。</a:t>
+              <a:t>边界声明：初赛聚焦 mock 环境任务级自主闭环（真 AgentTeams 框架运行 + 可复现断言）；会话级自由对话、真实系统接入、生产级风控在复赛推进。</a:t>
             </a:r>
             <a:r>
               <a:rPr sz="1100" b="0">
@@ -11535,7 +11535,7 @@
               </a:defRPr>
             </a:pPr>
             <a:r>
-              <a:t>高风险动作禁止默认放行——LLM 自主推理 + 决策与执行分离 + append-only 审计轨迹</a:t>
+              <a:t>自主成交的前提是可控：风险分级定边界、审批门禁管高危、决策与执行分离、审计全程留痕</a:t>
             </a:r>
           </a:p>
         </p:txBody>
@@ -14792,7 +14792,7 @@
                 <a:latin typeface="Microsoft YaHei"/>
                 <a:ea typeface="Microsoft YaHei"/>
               </a:rPr>
-              <a:t>围绕汽车销售全生命周期构建自主决策系统：Multi-Agent + Skill + MCP + RAG + 可观测</a:t>
+              <a:t>核心思路：把销售闭环拆成五段——自主能执行、协同可验证、经验可沉淀，越卖越聪明</a:t>
             </a:r>
           </a:p>
         </p:txBody>
@@ -16526,7 +16526,7 @@
                 <a:latin typeface="Microsoft YaHei"/>
                 <a:ea typeface="Microsoft YaHei"/>
               </a:rPr>
-              <a:t>每个 Agent 具备清晰身份定义与能力边界，通过协作完成端到端销售任务闭环</a:t>
+              <a:t>把人工销售链条拆成职责单一、风险边界隔离、可单独评估与替换的协作单元</a:t>
             </a:r>
           </a:p>
         </p:txBody>
@@ -18689,7 +18689,7 @@
                 <a:latin typeface="Microsoft YaHei"/>
                 <a:ea typeface="Microsoft YaHei"/>
               </a:rPr>
-              <a:t>以 family_suv_deal 场景展示任务级自主闭环（3 场景全部通过 selfcheck 56/56 断言）</a:t>
+              <a:t>二胎家庭张先生想换一台 25 万级大空间 SUV：从多渠道咨询到成交，系统全程自主推进、关键节点风控把关</a:t>
             </a:r>
           </a:p>
         </p:txBody>
@@ -21463,7 +21463,7 @@
                 <a:latin typeface="Microsoft YaHei"/>
                 <a:ea typeface="Microsoft YaHei"/>
               </a:rPr>
-              <a:t>角色编排、任务拆解、上下文传递、协同执行与状态追踪全部落到 AgentTeams 框架能力</a:t>
+              <a:t>不只提框架名字：编排、拆解、上下文、执行、追踪逐项映射到 AgentTeams 能力，并有真框架运行证据</a:t>
             </a:r>
           </a:p>
         </p:txBody>
@@ -22309,7 +22309,7 @@
                 <a:latin typeface="Microsoft YaHei"/>
                 <a:ea typeface="Microsoft YaHei"/>
               </a:rPr>
-              <a:t>Skill 作为任务能力抽象层：明确输入输出、调用条件、依赖工具、失败处理与安全边界</a:t>
+              <a:t>把专家销售经验变成可复用、可评估、可版本化的工程能力，而不是一次性提示词</a:t>
             </a:r>
           </a:p>
         </p:txBody>
@@ -24494,7 +24494,7 @@
                 <a:latin typeface="Microsoft YaHei"/>
                 <a:ea typeface="Microsoft YaHei"/>
               </a:rPr>
-              <a:t>Skill 承担任务能力抽象层，MCP 承担工具连接层，Higress 承担统一网关治理</a:t>
+              <a:t>用统一接口契约屏蔽企业系统差异：未来迁移 MCP Server 只需协议适配，业务侧零改动</a:t>
             </a:r>
           </a:p>
         </p:txBody>
